--- a/public/fun/cards/teacher/teacher-20.pptx
+++ b/public/fun/cards/teacher/teacher-20.pptx
@@ -3085,7 +3085,7 @@
     <p:bg>
       <p:bgPr>
         <a:solidFill>
-          <a:srgbClr val="884111"/>
+          <a:srgbClr val="111111"/>
         </a:solidFill>
         <a:effectLst/>
       </p:bgPr>
@@ -3099,22 +3099,20 @@
       <p:grpSpPr/>
       <p:sp>
         <p:nvSpPr>
-          <p:cNvPr id="2" name="Oval 1"/>
+          <p:cNvPr id="2" name="Rectangle 1"/>
           <p:cNvSpPr/>
           <p:nvPr/>
         </p:nvSpPr>
         <p:spPr>
           <a:xfrm>
-            <a:off x="2462400" y="158400"/>
-            <a:ext cx="43200" cy="43200"/>
+            <a:off x="252000" y="144000"/>
+            <a:ext cx="201600" cy="21600"/>
           </a:xfrm>
-          <a:prstGeom prst="ellipse">
+          <a:prstGeom prst="rect">
             <a:avLst/>
           </a:prstGeom>
           <a:solidFill>
-            <a:srgbClr val="EB955C">
-              <a:alpha val="70000"/>
-            </a:srgbClr>
+            <a:srgbClr val="FFFFFF"/>
           </a:solidFill>
           <a:ln>
             <a:noFill/>
@@ -3130,661 +3128,14 @@
       </p:sp>
       <p:sp>
         <p:nvSpPr>
-          <p:cNvPr id="3" name="Oval 2"/>
-          <p:cNvSpPr/>
+          <p:cNvPr id="3" name="텍스트"/>
+          <p:cNvSpPr txBox="1"/>
           <p:nvPr/>
         </p:nvSpPr>
         <p:spPr>
           <a:xfrm>
-            <a:off x="2462400" y="266400"/>
-            <a:ext cx="43200" cy="43200"/>
-          </a:xfrm>
-          <a:prstGeom prst="ellipse">
-            <a:avLst/>
-          </a:prstGeom>
-          <a:solidFill>
-            <a:srgbClr val="EB955C">
-              <a:alpha val="57999"/>
-            </a:srgbClr>
-          </a:solidFill>
-          <a:ln>
-            <a:noFill/>
-          </a:ln>
-        </p:spPr>
-        <p:txBody>
-          <a:bodyPr rtlCol="0" anchor="ctr"/>
-          <a:lstStyle/>
-          <a:p>
-            <a:pPr algn="ctr"/>
-          </a:p>
-        </p:txBody>
-      </p:sp>
-      <p:sp>
-        <p:nvSpPr>
-          <p:cNvPr id="4" name="Oval 3"/>
-          <p:cNvSpPr/>
-          <p:nvPr/>
-        </p:nvSpPr>
-        <p:spPr>
-          <a:xfrm>
-            <a:off x="2462400" y="374400"/>
-            <a:ext cx="43200" cy="43200"/>
-          </a:xfrm>
-          <a:prstGeom prst="ellipse">
-            <a:avLst/>
-          </a:prstGeom>
-          <a:solidFill>
-            <a:srgbClr val="EB955C">
-              <a:alpha val="46000"/>
-            </a:srgbClr>
-          </a:solidFill>
-          <a:ln>
-            <a:noFill/>
-          </a:ln>
-        </p:spPr>
-        <p:txBody>
-          <a:bodyPr rtlCol="0" anchor="ctr"/>
-          <a:lstStyle/>
-          <a:p>
-            <a:pPr algn="ctr"/>
-          </a:p>
-        </p:txBody>
-      </p:sp>
-      <p:sp>
-        <p:nvSpPr>
-          <p:cNvPr id="5" name="Oval 4"/>
-          <p:cNvSpPr/>
-          <p:nvPr/>
-        </p:nvSpPr>
-        <p:spPr>
-          <a:xfrm>
-            <a:off x="2462400" y="482400"/>
-            <a:ext cx="43200" cy="43200"/>
-          </a:xfrm>
-          <a:prstGeom prst="ellipse">
-            <a:avLst/>
-          </a:prstGeom>
-          <a:solidFill>
-            <a:srgbClr val="EB955C">
-              <a:alpha val="34000"/>
-            </a:srgbClr>
-          </a:solidFill>
-          <a:ln>
-            <a:noFill/>
-          </a:ln>
-        </p:spPr>
-        <p:txBody>
-          <a:bodyPr rtlCol="0" anchor="ctr"/>
-          <a:lstStyle/>
-          <a:p>
-            <a:pPr algn="ctr"/>
-          </a:p>
-        </p:txBody>
-      </p:sp>
-      <p:sp>
-        <p:nvSpPr>
-          <p:cNvPr id="6" name="Oval 5"/>
-          <p:cNvSpPr/>
-          <p:nvPr/>
-        </p:nvSpPr>
-        <p:spPr>
-          <a:xfrm>
-            <a:off x="2570400" y="158400"/>
-            <a:ext cx="43200" cy="43200"/>
-          </a:xfrm>
-          <a:prstGeom prst="ellipse">
-            <a:avLst/>
-          </a:prstGeom>
-          <a:solidFill>
-            <a:srgbClr val="EB955C">
-              <a:alpha val="70000"/>
-            </a:srgbClr>
-          </a:solidFill>
-          <a:ln>
-            <a:noFill/>
-          </a:ln>
-        </p:spPr>
-        <p:txBody>
-          <a:bodyPr rtlCol="0" anchor="ctr"/>
-          <a:lstStyle/>
-          <a:p>
-            <a:pPr algn="ctr"/>
-          </a:p>
-        </p:txBody>
-      </p:sp>
-      <p:sp>
-        <p:nvSpPr>
-          <p:cNvPr id="7" name="Oval 6"/>
-          <p:cNvSpPr/>
-          <p:nvPr/>
-        </p:nvSpPr>
-        <p:spPr>
-          <a:xfrm>
-            <a:off x="2570400" y="266400"/>
-            <a:ext cx="43200" cy="43200"/>
-          </a:xfrm>
-          <a:prstGeom prst="ellipse">
-            <a:avLst/>
-          </a:prstGeom>
-          <a:solidFill>
-            <a:srgbClr val="EB955C">
-              <a:alpha val="57999"/>
-            </a:srgbClr>
-          </a:solidFill>
-          <a:ln>
-            <a:noFill/>
-          </a:ln>
-        </p:spPr>
-        <p:txBody>
-          <a:bodyPr rtlCol="0" anchor="ctr"/>
-          <a:lstStyle/>
-          <a:p>
-            <a:pPr algn="ctr"/>
-          </a:p>
-        </p:txBody>
-      </p:sp>
-      <p:sp>
-        <p:nvSpPr>
-          <p:cNvPr id="8" name="Oval 7"/>
-          <p:cNvSpPr/>
-          <p:nvPr/>
-        </p:nvSpPr>
-        <p:spPr>
-          <a:xfrm>
-            <a:off x="2570400" y="374400"/>
-            <a:ext cx="43200" cy="43200"/>
-          </a:xfrm>
-          <a:prstGeom prst="ellipse">
-            <a:avLst/>
-          </a:prstGeom>
-          <a:solidFill>
-            <a:srgbClr val="EB955C">
-              <a:alpha val="46000"/>
-            </a:srgbClr>
-          </a:solidFill>
-          <a:ln>
-            <a:noFill/>
-          </a:ln>
-        </p:spPr>
-        <p:txBody>
-          <a:bodyPr rtlCol="0" anchor="ctr"/>
-          <a:lstStyle/>
-          <a:p>
-            <a:pPr algn="ctr"/>
-          </a:p>
-        </p:txBody>
-      </p:sp>
-      <p:sp>
-        <p:nvSpPr>
-          <p:cNvPr id="9" name="Oval 8"/>
-          <p:cNvSpPr/>
-          <p:nvPr/>
-        </p:nvSpPr>
-        <p:spPr>
-          <a:xfrm>
-            <a:off x="2570400" y="482400"/>
-            <a:ext cx="43200" cy="43200"/>
-          </a:xfrm>
-          <a:prstGeom prst="ellipse">
-            <a:avLst/>
-          </a:prstGeom>
-          <a:solidFill>
-            <a:srgbClr val="EB955C">
-              <a:alpha val="34000"/>
-            </a:srgbClr>
-          </a:solidFill>
-          <a:ln>
-            <a:noFill/>
-          </a:ln>
-        </p:spPr>
-        <p:txBody>
-          <a:bodyPr rtlCol="0" anchor="ctr"/>
-          <a:lstStyle/>
-          <a:p>
-            <a:pPr algn="ctr"/>
-          </a:p>
-        </p:txBody>
-      </p:sp>
-      <p:sp>
-        <p:nvSpPr>
-          <p:cNvPr id="10" name="Oval 9"/>
-          <p:cNvSpPr/>
-          <p:nvPr/>
-        </p:nvSpPr>
-        <p:spPr>
-          <a:xfrm>
-            <a:off x="2678400" y="158400"/>
-            <a:ext cx="43200" cy="43200"/>
-          </a:xfrm>
-          <a:prstGeom prst="ellipse">
-            <a:avLst/>
-          </a:prstGeom>
-          <a:solidFill>
-            <a:srgbClr val="EB955C">
-              <a:alpha val="70000"/>
-            </a:srgbClr>
-          </a:solidFill>
-          <a:ln>
-            <a:noFill/>
-          </a:ln>
-        </p:spPr>
-        <p:txBody>
-          <a:bodyPr rtlCol="0" anchor="ctr"/>
-          <a:lstStyle/>
-          <a:p>
-            <a:pPr algn="ctr"/>
-          </a:p>
-        </p:txBody>
-      </p:sp>
-      <p:sp>
-        <p:nvSpPr>
-          <p:cNvPr id="11" name="Oval 10"/>
-          <p:cNvSpPr/>
-          <p:nvPr/>
-        </p:nvSpPr>
-        <p:spPr>
-          <a:xfrm>
-            <a:off x="2678400" y="266400"/>
-            <a:ext cx="43200" cy="43200"/>
-          </a:xfrm>
-          <a:prstGeom prst="ellipse">
-            <a:avLst/>
-          </a:prstGeom>
-          <a:solidFill>
-            <a:srgbClr val="EB955C">
-              <a:alpha val="57999"/>
-            </a:srgbClr>
-          </a:solidFill>
-          <a:ln>
-            <a:noFill/>
-          </a:ln>
-        </p:spPr>
-        <p:txBody>
-          <a:bodyPr rtlCol="0" anchor="ctr"/>
-          <a:lstStyle/>
-          <a:p>
-            <a:pPr algn="ctr"/>
-          </a:p>
-        </p:txBody>
-      </p:sp>
-      <p:sp>
-        <p:nvSpPr>
-          <p:cNvPr id="12" name="Oval 11"/>
-          <p:cNvSpPr/>
-          <p:nvPr/>
-        </p:nvSpPr>
-        <p:spPr>
-          <a:xfrm>
-            <a:off x="2678400" y="374400"/>
-            <a:ext cx="43200" cy="43200"/>
-          </a:xfrm>
-          <a:prstGeom prst="ellipse">
-            <a:avLst/>
-          </a:prstGeom>
-          <a:solidFill>
-            <a:srgbClr val="EB955C">
-              <a:alpha val="46000"/>
-            </a:srgbClr>
-          </a:solidFill>
-          <a:ln>
-            <a:noFill/>
-          </a:ln>
-        </p:spPr>
-        <p:txBody>
-          <a:bodyPr rtlCol="0" anchor="ctr"/>
-          <a:lstStyle/>
-          <a:p>
-            <a:pPr algn="ctr"/>
-          </a:p>
-        </p:txBody>
-      </p:sp>
-      <p:sp>
-        <p:nvSpPr>
-          <p:cNvPr id="13" name="Oval 12"/>
-          <p:cNvSpPr/>
-          <p:nvPr/>
-        </p:nvSpPr>
-        <p:spPr>
-          <a:xfrm>
-            <a:off x="2678400" y="482400"/>
-            <a:ext cx="43200" cy="43200"/>
-          </a:xfrm>
-          <a:prstGeom prst="ellipse">
-            <a:avLst/>
-          </a:prstGeom>
-          <a:solidFill>
-            <a:srgbClr val="EB955C">
-              <a:alpha val="34000"/>
-            </a:srgbClr>
-          </a:solidFill>
-          <a:ln>
-            <a:noFill/>
-          </a:ln>
-        </p:spPr>
-        <p:txBody>
-          <a:bodyPr rtlCol="0" anchor="ctr"/>
-          <a:lstStyle/>
-          <a:p>
-            <a:pPr algn="ctr"/>
-          </a:p>
-        </p:txBody>
-      </p:sp>
-      <p:sp>
-        <p:nvSpPr>
-          <p:cNvPr id="14" name="Oval 13"/>
-          <p:cNvSpPr/>
-          <p:nvPr/>
-        </p:nvSpPr>
-        <p:spPr>
-          <a:xfrm>
-            <a:off x="2786400" y="158400"/>
-            <a:ext cx="43200" cy="43200"/>
-          </a:xfrm>
-          <a:prstGeom prst="ellipse">
-            <a:avLst/>
-          </a:prstGeom>
-          <a:solidFill>
-            <a:srgbClr val="EB955C">
-              <a:alpha val="70000"/>
-            </a:srgbClr>
-          </a:solidFill>
-          <a:ln>
-            <a:noFill/>
-          </a:ln>
-        </p:spPr>
-        <p:txBody>
-          <a:bodyPr rtlCol="0" anchor="ctr"/>
-          <a:lstStyle/>
-          <a:p>
-            <a:pPr algn="ctr"/>
-          </a:p>
-        </p:txBody>
-      </p:sp>
-      <p:sp>
-        <p:nvSpPr>
-          <p:cNvPr id="15" name="Oval 14"/>
-          <p:cNvSpPr/>
-          <p:nvPr/>
-        </p:nvSpPr>
-        <p:spPr>
-          <a:xfrm>
-            <a:off x="2786400" y="266400"/>
-            <a:ext cx="43200" cy="43200"/>
-          </a:xfrm>
-          <a:prstGeom prst="ellipse">
-            <a:avLst/>
-          </a:prstGeom>
-          <a:solidFill>
-            <a:srgbClr val="EB955C">
-              <a:alpha val="57999"/>
-            </a:srgbClr>
-          </a:solidFill>
-          <a:ln>
-            <a:noFill/>
-          </a:ln>
-        </p:spPr>
-        <p:txBody>
-          <a:bodyPr rtlCol="0" anchor="ctr"/>
-          <a:lstStyle/>
-          <a:p>
-            <a:pPr algn="ctr"/>
-          </a:p>
-        </p:txBody>
-      </p:sp>
-      <p:sp>
-        <p:nvSpPr>
-          <p:cNvPr id="16" name="Oval 15"/>
-          <p:cNvSpPr/>
-          <p:nvPr/>
-        </p:nvSpPr>
-        <p:spPr>
-          <a:xfrm>
-            <a:off x="2786400" y="374400"/>
-            <a:ext cx="43200" cy="43200"/>
-          </a:xfrm>
-          <a:prstGeom prst="ellipse">
-            <a:avLst/>
-          </a:prstGeom>
-          <a:solidFill>
-            <a:srgbClr val="EB955C">
-              <a:alpha val="46000"/>
-            </a:srgbClr>
-          </a:solidFill>
-          <a:ln>
-            <a:noFill/>
-          </a:ln>
-        </p:spPr>
-        <p:txBody>
-          <a:bodyPr rtlCol="0" anchor="ctr"/>
-          <a:lstStyle/>
-          <a:p>
-            <a:pPr algn="ctr"/>
-          </a:p>
-        </p:txBody>
-      </p:sp>
-      <p:sp>
-        <p:nvSpPr>
-          <p:cNvPr id="17" name="Oval 16"/>
-          <p:cNvSpPr/>
-          <p:nvPr/>
-        </p:nvSpPr>
-        <p:spPr>
-          <a:xfrm>
-            <a:off x="2786400" y="482400"/>
-            <a:ext cx="43200" cy="43200"/>
-          </a:xfrm>
-          <a:prstGeom prst="ellipse">
-            <a:avLst/>
-          </a:prstGeom>
-          <a:solidFill>
-            <a:srgbClr val="EB955C">
-              <a:alpha val="34000"/>
-            </a:srgbClr>
-          </a:solidFill>
-          <a:ln>
-            <a:noFill/>
-          </a:ln>
-        </p:spPr>
-        <p:txBody>
-          <a:bodyPr rtlCol="0" anchor="ctr"/>
-          <a:lstStyle/>
-          <a:p>
-            <a:pPr algn="ctr"/>
-          </a:p>
-        </p:txBody>
-      </p:sp>
-      <p:sp>
-        <p:nvSpPr>
-          <p:cNvPr id="18" name="Oval 17"/>
-          <p:cNvSpPr/>
-          <p:nvPr/>
-        </p:nvSpPr>
-        <p:spPr>
-          <a:xfrm>
-            <a:off x="2894400" y="158400"/>
-            <a:ext cx="43200" cy="43200"/>
-          </a:xfrm>
-          <a:prstGeom prst="ellipse">
-            <a:avLst/>
-          </a:prstGeom>
-          <a:solidFill>
-            <a:srgbClr val="EB955C">
-              <a:alpha val="70000"/>
-            </a:srgbClr>
-          </a:solidFill>
-          <a:ln>
-            <a:noFill/>
-          </a:ln>
-        </p:spPr>
-        <p:txBody>
-          <a:bodyPr rtlCol="0" anchor="ctr"/>
-          <a:lstStyle/>
-          <a:p>
-            <a:pPr algn="ctr"/>
-          </a:p>
-        </p:txBody>
-      </p:sp>
-      <p:sp>
-        <p:nvSpPr>
-          <p:cNvPr id="19" name="Oval 18"/>
-          <p:cNvSpPr/>
-          <p:nvPr/>
-        </p:nvSpPr>
-        <p:spPr>
-          <a:xfrm>
-            <a:off x="2894400" y="266400"/>
-            <a:ext cx="43200" cy="43200"/>
-          </a:xfrm>
-          <a:prstGeom prst="ellipse">
-            <a:avLst/>
-          </a:prstGeom>
-          <a:solidFill>
-            <a:srgbClr val="EB955C">
-              <a:alpha val="57999"/>
-            </a:srgbClr>
-          </a:solidFill>
-          <a:ln>
-            <a:noFill/>
-          </a:ln>
-        </p:spPr>
-        <p:txBody>
-          <a:bodyPr rtlCol="0" anchor="ctr"/>
-          <a:lstStyle/>
-          <a:p>
-            <a:pPr algn="ctr"/>
-          </a:p>
-        </p:txBody>
-      </p:sp>
-      <p:sp>
-        <p:nvSpPr>
-          <p:cNvPr id="20" name="Oval 19"/>
-          <p:cNvSpPr/>
-          <p:nvPr/>
-        </p:nvSpPr>
-        <p:spPr>
-          <a:xfrm>
-            <a:off x="2894400" y="374400"/>
-            <a:ext cx="43200" cy="43200"/>
-          </a:xfrm>
-          <a:prstGeom prst="ellipse">
-            <a:avLst/>
-          </a:prstGeom>
-          <a:solidFill>
-            <a:srgbClr val="EB955C">
-              <a:alpha val="46000"/>
-            </a:srgbClr>
-          </a:solidFill>
-          <a:ln>
-            <a:noFill/>
-          </a:ln>
-        </p:spPr>
-        <p:txBody>
-          <a:bodyPr rtlCol="0" anchor="ctr"/>
-          <a:lstStyle/>
-          <a:p>
-            <a:pPr algn="ctr"/>
-          </a:p>
-        </p:txBody>
-      </p:sp>
-      <p:sp>
-        <p:nvSpPr>
-          <p:cNvPr id="21" name="Oval 20"/>
-          <p:cNvSpPr/>
-          <p:nvPr/>
-        </p:nvSpPr>
-        <p:spPr>
-          <a:xfrm>
-            <a:off x="2894400" y="482400"/>
-            <a:ext cx="43200" cy="43200"/>
-          </a:xfrm>
-          <a:prstGeom prst="ellipse">
-            <a:avLst/>
-          </a:prstGeom>
-          <a:solidFill>
-            <a:srgbClr val="EB955C">
-              <a:alpha val="34000"/>
-            </a:srgbClr>
-          </a:solidFill>
-          <a:ln>
-            <a:noFill/>
-          </a:ln>
-        </p:spPr>
-        <p:txBody>
-          <a:bodyPr rtlCol="0" anchor="ctr"/>
-          <a:lstStyle/>
-          <a:p>
-            <a:pPr algn="ctr"/>
-          </a:p>
-        </p:txBody>
-      </p:sp>
-      <p:sp>
-        <p:nvSpPr>
-          <p:cNvPr id="22" name="Rectangle 21"/>
-          <p:cNvSpPr/>
-          <p:nvPr/>
-        </p:nvSpPr>
-        <p:spPr>
-          <a:xfrm>
-            <a:off x="0" y="1663200"/>
-            <a:ext cx="3240000" cy="136800"/>
-          </a:xfrm>
-          <a:prstGeom prst="rect">
-            <a:avLst/>
-          </a:prstGeom>
-          <a:solidFill>
-            <a:srgbClr val="EB955C"/>
-          </a:solidFill>
-          <a:ln>
-            <a:noFill/>
-          </a:ln>
-        </p:spPr>
-        <p:txBody>
-          <a:bodyPr rtlCol="0" anchor="ctr"/>
-          <a:lstStyle/>
-          <a:p>
-            <a:pPr algn="ctr"/>
-          </a:p>
-        </p:txBody>
-      </p:sp>
-      <p:sp>
-        <p:nvSpPr>
-          <p:cNvPr id="23" name="Rectangle 22"/>
-          <p:cNvSpPr/>
-          <p:nvPr/>
-        </p:nvSpPr>
-        <p:spPr>
-          <a:xfrm>
-            <a:off x="0" y="1663200"/>
-            <a:ext cx="936000" cy="136800"/>
-          </a:xfrm>
-          <a:prstGeom prst="rect">
-            <a:avLst/>
-          </a:prstGeom>
-          <a:solidFill>
-            <a:srgbClr val="9B5F37"/>
-          </a:solidFill>
-          <a:ln>
-            <a:noFill/>
-          </a:ln>
-        </p:spPr>
-        <p:txBody>
-          <a:bodyPr rtlCol="0" anchor="ctr"/>
-          <a:lstStyle/>
-          <a:p>
-            <a:pPr algn="ctr"/>
-          </a:p>
-        </p:txBody>
-      </p:sp>
-      <p:sp>
-        <p:nvSpPr>
-          <p:cNvPr id="24" name="텍스트"/>
-          <p:cNvSpPr txBox="1"/>
-          <p:nvPr/>
-        </p:nvSpPr>
-        <p:spPr>
-          <a:xfrm>
-            <a:off x="252000" y="208800"/>
-            <a:ext cx="1800000" cy="100800"/>
+            <a:off x="252000" y="273600"/>
+            <a:ext cx="2160000" cy="360000"/>
           </a:xfrm>
           <a:prstGeom prst="rect">
             <a:avLst/>
@@ -3799,51 +3150,11 @@
           <a:p>
             <a:pPr algn="l">
               <a:lnSpc>
-                <a:spcPts val="1087"/>
+                <a:spcPts val="3190"/>
               </a:lnSpc>
             </a:pPr>
             <a:r>
-              <a:rPr sz="750" b="1" spc="150">
-                <a:solidFill>
-                  <a:srgbClr val="DBC6B8"/>
-                </a:solidFill>
-                <a:latin typeface="맑은 고딕"/>
-                <a:ea typeface="맑은 고딕"/>
-              </a:rPr>
-              <a:t>학교 · 학원 이름</a:t>
-            </a:r>
-          </a:p>
-        </p:txBody>
-      </p:sp>
-      <p:sp>
-        <p:nvSpPr>
-          <p:cNvPr id="25" name="텍스트"/>
-          <p:cNvSpPr txBox="1"/>
-          <p:nvPr/>
-        </p:nvSpPr>
-        <p:spPr>
-          <a:xfrm>
-            <a:off x="252000" y="540000"/>
-            <a:ext cx="2016000" cy="313692"/>
-          </a:xfrm>
-          <a:prstGeom prst="rect">
-            <a:avLst/>
-          </a:prstGeom>
-          <a:noFill/>
-        </p:spPr>
-        <p:txBody>
-          <a:bodyPr wrap="square" lIns="0" rIns="0" tIns="0" bIns="0" anchor="t">
-            <a:spAutoFit/>
-          </a:bodyPr>
-          <a:lstStyle/>
-          <a:p>
-            <a:pPr algn="l">
-              <a:lnSpc>
-                <a:spcPts val="2755"/>
-              </a:lnSpc>
-            </a:pPr>
-            <a:r>
-              <a:rPr sz="1900" b="1" spc="50">
+              <a:rPr sz="2200" b="1">
                 <a:solidFill>
                   <a:srgbClr val="FFFFFF"/>
                 </a:solidFill>
@@ -3857,14 +3168,14 @@
       </p:sp>
       <p:sp>
         <p:nvSpPr>
-          <p:cNvPr id="26" name="텍스트"/>
+          <p:cNvPr id="4" name="텍스트"/>
           <p:cNvSpPr txBox="1"/>
           <p:nvPr/>
         </p:nvSpPr>
         <p:spPr>
           <a:xfrm>
-            <a:off x="252000" y="828000"/>
-            <a:ext cx="2016000" cy="122400"/>
+            <a:off x="252000" y="676800"/>
+            <a:ext cx="2160000" cy="171451"/>
           </a:xfrm>
           <a:prstGeom prst="rect">
             <a:avLst/>
@@ -3879,13 +3190,13 @@
           <a:p>
             <a:pPr algn="l">
               <a:lnSpc>
-                <a:spcPts val="1232"/>
+                <a:spcPts val="1305"/>
               </a:lnSpc>
             </a:pPr>
             <a:r>
-              <a:rPr sz="850" b="1">
+              <a:rPr sz="900" b="0">
                 <a:solidFill>
-                  <a:srgbClr val="F3BF9D"/>
+                  <a:srgbClr val="CBCBCB"/>
                 </a:solidFill>
                 <a:latin typeface="맑은 고딕"/>
                 <a:ea typeface="맑은 고딕"/>
@@ -3897,14 +3208,14 @@
       </p:sp>
       <p:sp>
         <p:nvSpPr>
-          <p:cNvPr id="27" name="텍스트"/>
+          <p:cNvPr id="5" name="텍스트"/>
           <p:cNvSpPr txBox="1"/>
           <p:nvPr/>
         </p:nvSpPr>
         <p:spPr>
           <a:xfrm>
-            <a:off x="252000" y="1108800"/>
-            <a:ext cx="122400" cy="168911"/>
+            <a:off x="1548000" y="230400"/>
+            <a:ext cx="1440000" cy="123826"/>
           </a:xfrm>
           <a:prstGeom prst="rect">
             <a:avLst/>
@@ -3917,34 +3228,55 @@
           </a:bodyPr>
           <a:lstStyle/>
           <a:p>
-            <a:pPr algn="l">
+            <a:pPr algn="r">
               <a:lnSpc>
-                <a:spcPts val="1015"/>
+                <a:spcPts val="942"/>
               </a:lnSpc>
             </a:pPr>
             <a:r>
-              <a:rPr sz="700" b="1">
+              <a:rPr sz="650" b="1" spc="200">
                 <a:solidFill>
-                  <a:srgbClr val="F3BF9D"/>
+                  <a:srgbClr val="CBCBCB"/>
                 </a:solidFill>
                 <a:latin typeface="맑은 고딕"/>
                 <a:ea typeface="맑은 고딕"/>
               </a:rPr>
-              <a:t>T</a:t>
-            </a:r>
-          </a:p>
-        </p:txBody>
-      </p:sp>
-      <p:sp>
-        <p:nvSpPr>
-          <p:cNvPr id="28" name="텍스트"/>
+              <a:t>학교 · 학원 이름</a:t>
+            </a:r>
+          </a:p>
+        </p:txBody>
+      </p:sp>
+      <p:cxnSp>
+        <p:nvCxnSpPr>
+          <p:cNvPr id="6" name="Connector 5"/>
+          <p:cNvCxnSpPr/>
+          <p:nvPr/>
+        </p:nvCxnSpPr>
+        <p:spPr>
+          <a:xfrm>
+            <a:off x="252000" y="1051200"/>
+            <a:ext cx="2736000" cy="0"/>
+          </a:xfrm>
+          <a:prstGeom prst="line">
+            <a:avLst/>
+          </a:prstGeom>
+          <a:ln w="5760">
+            <a:solidFill>
+              <a:srgbClr val="707070"/>
+            </a:solidFill>
+          </a:ln>
+        </p:spPr>
+      </p:cxnSp>
+      <p:sp>
+        <p:nvSpPr>
+          <p:cNvPr id="7" name="텍스트"/>
           <p:cNvSpPr txBox="1"/>
           <p:nvPr/>
         </p:nvSpPr>
         <p:spPr>
           <a:xfrm>
-            <a:off x="396000" y="1108800"/>
-            <a:ext cx="1584000" cy="168911"/>
+            <a:off x="252000" y="1123200"/>
+            <a:ext cx="576000" cy="99061"/>
           </a:xfrm>
           <a:prstGeom prst="rect">
             <a:avLst/>
@@ -3959,11 +3291,51 @@
           <a:p>
             <a:pPr algn="l">
               <a:lnSpc>
-                <a:spcPts val="1015"/>
+                <a:spcPts val="754"/>
               </a:lnSpc>
             </a:pPr>
             <a:r>
-              <a:rPr sz="700" b="0">
+              <a:rPr sz="520" b="1" spc="150">
+                <a:solidFill>
+                  <a:srgbClr val="CBCBCB"/>
+                </a:solidFill>
+                <a:latin typeface="맑은 고딕"/>
+                <a:ea typeface="맑은 고딕"/>
+              </a:rPr>
+              <a:t>TEL</a:t>
+            </a:r>
+          </a:p>
+        </p:txBody>
+      </p:sp>
+      <p:sp>
+        <p:nvSpPr>
+          <p:cNvPr id="8" name="텍스트"/>
+          <p:cNvSpPr txBox="1"/>
+          <p:nvPr/>
+        </p:nvSpPr>
+        <p:spPr>
+          <a:xfrm>
+            <a:off x="900000" y="1101600"/>
+            <a:ext cx="2088000" cy="142876"/>
+          </a:xfrm>
+          <a:prstGeom prst="rect">
+            <a:avLst/>
+          </a:prstGeom>
+          <a:noFill/>
+        </p:spPr>
+        <p:txBody>
+          <a:bodyPr wrap="square" lIns="0" rIns="0" tIns="0" bIns="0" anchor="t">
+            <a:spAutoFit/>
+          </a:bodyPr>
+          <a:lstStyle/>
+          <a:p>
+            <a:pPr algn="l">
+              <a:lnSpc>
+                <a:spcPts val="1087"/>
+              </a:lnSpc>
+            </a:pPr>
+            <a:r>
+              <a:rPr sz="750" b="0">
                 <a:solidFill>
                   <a:srgbClr val="FFFFFF"/>
                 </a:solidFill>
@@ -3975,16 +3347,37 @@
           </a:p>
         </p:txBody>
       </p:sp>
-      <p:sp>
-        <p:nvSpPr>
-          <p:cNvPr id="29" name="텍스트"/>
+      <p:cxnSp>
+        <p:nvCxnSpPr>
+          <p:cNvPr id="9" name="Connector 8"/>
+          <p:cNvCxnSpPr/>
+          <p:nvPr/>
+        </p:nvCxnSpPr>
+        <p:spPr>
+          <a:xfrm>
+            <a:off x="252000" y="1274400"/>
+            <a:ext cx="2736000" cy="0"/>
+          </a:xfrm>
+          <a:prstGeom prst="line">
+            <a:avLst/>
+          </a:prstGeom>
+          <a:ln w="5760">
+            <a:solidFill>
+              <a:srgbClr val="707070"/>
+            </a:solidFill>
+          </a:ln>
+        </p:spPr>
+      </p:cxnSp>
+      <p:sp>
+        <p:nvSpPr>
+          <p:cNvPr id="10" name="텍스트"/>
           <p:cNvSpPr txBox="1"/>
           <p:nvPr/>
         </p:nvSpPr>
         <p:spPr>
           <a:xfrm>
-            <a:off x="252000" y="1277711"/>
-            <a:ext cx="122400" cy="168911"/>
+            <a:off x="252000" y="1346400"/>
+            <a:ext cx="576000" cy="99061"/>
           </a:xfrm>
           <a:prstGeom prst="rect">
             <a:avLst/>
@@ -3999,32 +3392,32 @@
           <a:p>
             <a:pPr algn="l">
               <a:lnSpc>
-                <a:spcPts val="1015"/>
+                <a:spcPts val="754"/>
               </a:lnSpc>
             </a:pPr>
             <a:r>
-              <a:rPr sz="700" b="1">
+              <a:rPr sz="520" b="1" spc="150">
                 <a:solidFill>
-                  <a:srgbClr val="F3BF9D"/>
+                  <a:srgbClr val="CBCBCB"/>
                 </a:solidFill>
                 <a:latin typeface="맑은 고딕"/>
                 <a:ea typeface="맑은 고딕"/>
               </a:rPr>
-              <a:t>E</a:t>
-            </a:r>
-          </a:p>
-        </p:txBody>
-      </p:sp>
-      <p:sp>
-        <p:nvSpPr>
-          <p:cNvPr id="30" name="텍스트"/>
+              <a:t>MAIL</a:t>
+            </a:r>
+          </a:p>
+        </p:txBody>
+      </p:sp>
+      <p:sp>
+        <p:nvSpPr>
+          <p:cNvPr id="11" name="텍스트"/>
           <p:cNvSpPr txBox="1"/>
           <p:nvPr/>
         </p:nvSpPr>
         <p:spPr>
           <a:xfrm>
-            <a:off x="396000" y="1277711"/>
-            <a:ext cx="1584000" cy="168911"/>
+            <a:off x="900000" y="1324800"/>
+            <a:ext cx="2088000" cy="142876"/>
           </a:xfrm>
           <a:prstGeom prst="rect">
             <a:avLst/>
@@ -4039,11 +3432,11 @@
           <a:p>
             <a:pPr algn="l">
               <a:lnSpc>
-                <a:spcPts val="1015"/>
+                <a:spcPts val="1087"/>
               </a:lnSpc>
             </a:pPr>
             <a:r>
-              <a:rPr sz="700" b="0">
+              <a:rPr sz="750" b="0">
                 <a:solidFill>
                   <a:srgbClr val="FFFFFF"/>
                 </a:solidFill>
@@ -4055,16 +3448,37 @@
           </a:p>
         </p:txBody>
       </p:sp>
-      <p:sp>
-        <p:nvSpPr>
-          <p:cNvPr id="31" name="텍스트"/>
+      <p:cxnSp>
+        <p:nvCxnSpPr>
+          <p:cNvPr id="12" name="Connector 11"/>
+          <p:cNvCxnSpPr/>
+          <p:nvPr/>
+        </p:nvCxnSpPr>
+        <p:spPr>
+          <a:xfrm>
+            <a:off x="252000" y="1497600"/>
+            <a:ext cx="2736000" cy="0"/>
+          </a:xfrm>
+          <a:prstGeom prst="line">
+            <a:avLst/>
+          </a:prstGeom>
+          <a:ln w="5760">
+            <a:solidFill>
+              <a:srgbClr val="707070"/>
+            </a:solidFill>
+          </a:ln>
+        </p:spPr>
+      </p:cxnSp>
+      <p:sp>
+        <p:nvSpPr>
+          <p:cNvPr id="13" name="텍스트"/>
           <p:cNvSpPr txBox="1"/>
           <p:nvPr/>
         </p:nvSpPr>
         <p:spPr>
           <a:xfrm>
-            <a:off x="252000" y="1446622"/>
-            <a:ext cx="122400" cy="168911"/>
+            <a:off x="252000" y="1569600"/>
+            <a:ext cx="576000" cy="99061"/>
           </a:xfrm>
           <a:prstGeom prst="rect">
             <a:avLst/>
@@ -4079,32 +3493,32 @@
           <a:p>
             <a:pPr algn="l">
               <a:lnSpc>
-                <a:spcPts val="1015"/>
+                <a:spcPts val="754"/>
               </a:lnSpc>
             </a:pPr>
             <a:r>
-              <a:rPr sz="700" b="1">
+              <a:rPr sz="520" b="1" spc="150">
                 <a:solidFill>
-                  <a:srgbClr val="F3BF9D"/>
+                  <a:srgbClr val="CBCBCB"/>
                 </a:solidFill>
                 <a:latin typeface="맑은 고딕"/>
                 <a:ea typeface="맑은 고딕"/>
               </a:rPr>
-              <a:t>A</a:t>
-            </a:r>
-          </a:p>
-        </p:txBody>
-      </p:sp>
-      <p:sp>
-        <p:nvSpPr>
-          <p:cNvPr id="32" name="텍스트"/>
+              <a:t>ADDR</a:t>
+            </a:r>
+          </a:p>
+        </p:txBody>
+      </p:sp>
+      <p:sp>
+        <p:nvSpPr>
+          <p:cNvPr id="14" name="텍스트"/>
           <p:cNvSpPr txBox="1"/>
           <p:nvPr/>
         </p:nvSpPr>
         <p:spPr>
           <a:xfrm>
-            <a:off x="396000" y="1446622"/>
-            <a:ext cx="1584000" cy="168911"/>
+            <a:off x="900000" y="1548000"/>
+            <a:ext cx="2088000" cy="142876"/>
           </a:xfrm>
           <a:prstGeom prst="rect">
             <a:avLst/>
@@ -4119,11 +3533,11 @@
           <a:p>
             <a:pPr algn="l">
               <a:lnSpc>
-                <a:spcPts val="1015"/>
+                <a:spcPts val="1087"/>
               </a:lnSpc>
             </a:pPr>
             <a:r>
-              <a:rPr sz="700" b="0">
+              <a:rPr sz="750" b="0">
                 <a:solidFill>
                   <a:srgbClr val="FFFFFF"/>
                 </a:solidFill>
@@ -4135,106 +3549,27 @@
           </a:p>
         </p:txBody>
       </p:sp>
-      <p:sp>
-        <p:nvSpPr>
-          <p:cNvPr id="33" name="Freeform 32"/>
-          <p:cNvSpPr/>
+      <p:cxnSp>
+        <p:nvCxnSpPr>
+          <p:cNvPr id="15" name="Connector 14"/>
+          <p:cNvCxnSpPr/>
           <p:nvPr/>
-        </p:nvSpPr>
+        </p:nvCxnSpPr>
         <p:spPr>
           <a:xfrm>
-            <a:off x="2747520" y="1107360"/>
-            <a:ext cx="126720" cy="184320"/>
+            <a:off x="252000" y="1720800"/>
+            <a:ext cx="2736000" cy="0"/>
           </a:xfrm>
-          <a:custGeom>
+          <a:prstGeom prst="line">
             <a:avLst/>
-            <a:gdLst/>
-            <a:ahLst/>
-            <a:cxnLst/>
-            <a:rect l="l" t="t" r="r" b="b"/>
-            <a:pathLst>
-              <a:path w="126720" h="184320">
-                <a:moveTo>
-                  <a:pt x="0" y="0"/>
-                </a:moveTo>
-                <a:lnTo>
-                  <a:pt x="126720" y="23040"/>
-                </a:lnTo>
-                <a:lnTo>
-                  <a:pt x="126720" y="184320"/>
-                </a:lnTo>
-                <a:lnTo>
-                  <a:pt x="0" y="161280"/>
-                </a:lnTo>
-                <a:close/>
-              </a:path>
-            </a:pathLst>
-          </a:custGeom>
-          <a:solidFill>
-            <a:srgbClr val="EB955C"/>
-          </a:solidFill>
-          <a:ln>
-            <a:noFill/>
+          </a:prstGeom>
+          <a:ln w="5760">
+            <a:solidFill>
+              <a:srgbClr val="707070"/>
+            </a:solidFill>
           </a:ln>
         </p:spPr>
-        <p:txBody>
-          <a:bodyPr rtlCol="0" anchor="ctr"/>
-          <a:lstStyle/>
-          <a:p>
-            <a:pPr algn="ctr"/>
-          </a:p>
-        </p:txBody>
-      </p:sp>
-      <p:sp>
-        <p:nvSpPr>
-          <p:cNvPr id="34" name="Freeform 33"/>
-          <p:cNvSpPr/>
-          <p:nvPr/>
-        </p:nvSpPr>
-        <p:spPr>
-          <a:xfrm>
-            <a:off x="2885760" y="1107360"/>
-            <a:ext cx="126720" cy="184320"/>
-          </a:xfrm>
-          <a:custGeom>
-            <a:avLst/>
-            <a:gdLst/>
-            <a:ahLst/>
-            <a:cxnLst/>
-            <a:rect l="l" t="t" r="r" b="b"/>
-            <a:pathLst>
-              <a:path w="126720" h="184320">
-                <a:moveTo>
-                  <a:pt x="126720" y="0"/>
-                </a:moveTo>
-                <a:lnTo>
-                  <a:pt x="0" y="23040"/>
-                </a:lnTo>
-                <a:lnTo>
-                  <a:pt x="0" y="184320"/>
-                </a:lnTo>
-                <a:lnTo>
-                  <a:pt x="126720" y="161280"/>
-                </a:lnTo>
-                <a:close/>
-              </a:path>
-            </a:pathLst>
-          </a:custGeom>
-          <a:solidFill>
-            <a:srgbClr val="9B5F37"/>
-          </a:solidFill>
-          <a:ln>
-            <a:noFill/>
-          </a:ln>
-        </p:spPr>
-        <p:txBody>
-          <a:bodyPr rtlCol="0" anchor="ctr"/>
-          <a:lstStyle/>
-          <a:p>
-            <a:pPr algn="ctr"/>
-          </a:p>
-        </p:txBody>
-      </p:sp>
+      </p:cxnSp>
     </p:spTree>
   </p:cSld>
   <p:clrMapOvr>
@@ -4249,7 +3584,7 @@
     <p:bg>
       <p:bgPr>
         <a:solidFill>
-          <a:srgbClr val="884111"/>
+          <a:srgbClr val="0E1116"/>
         </a:solidFill>
         <a:effectLst/>
       </p:bgPr>
@@ -4263,173 +3598,14 @@
       <p:grpSpPr/>
       <p:sp>
         <p:nvSpPr>
-          <p:cNvPr id="2" name="Rectangle 1"/>
+          <p:cNvPr id="2" name="Freeform 1"/>
           <p:cNvSpPr/>
           <p:nvPr/>
         </p:nvSpPr>
         <p:spPr>
           <a:xfrm>
-            <a:off x="108000" y="108000"/>
-            <a:ext cx="3024000" cy="1584000"/>
-          </a:xfrm>
-          <a:prstGeom prst="rect">
-            <a:avLst/>
-          </a:prstGeom>
-          <a:noFill/>
-          <a:ln w="10800">
-            <a:solidFill>
-              <a:srgbClr val="EB955C"/>
-            </a:solidFill>
-          </a:ln>
-        </p:spPr>
-        <p:txBody>
-          <a:bodyPr rtlCol="0" anchor="ctr"/>
-          <a:lstStyle/>
-          <a:p>
-            <a:pPr algn="ctr"/>
-          </a:p>
-        </p:txBody>
-      </p:sp>
-      <p:sp>
-        <p:nvSpPr>
-          <p:cNvPr id="3" name="텍스트"/>
-          <p:cNvSpPr txBox="1"/>
-          <p:nvPr/>
-        </p:nvSpPr>
-        <p:spPr>
-          <a:xfrm>
-            <a:off x="396000" y="504000"/>
-            <a:ext cx="2448000" cy="432000"/>
-          </a:xfrm>
-          <a:prstGeom prst="rect">
-            <a:avLst/>
-          </a:prstGeom>
-          <a:noFill/>
-        </p:spPr>
-        <p:txBody>
-          <a:bodyPr wrap="square" lIns="0" rIns="0" tIns="0" bIns="0" anchor="ctr">
-            <a:spAutoFit/>
-          </a:bodyPr>
-          <a:lstStyle/>
-          <a:p>
-            <a:pPr algn="ctr">
-              <a:lnSpc>
-                <a:spcPts val="1739"/>
-              </a:lnSpc>
-            </a:pPr>
-            <a:r>
-              <a:rPr sz="1200" b="1">
-                <a:solidFill>
-                  <a:srgbClr val="FFFFFF"/>
-                </a:solidFill>
-                <a:latin typeface="맑은 고딕"/>
-                <a:ea typeface="맑은 고딕"/>
-              </a:rPr>
-              <a:t>작은 변화도 놓치지 않겠습니다</a:t>
-            </a:r>
-          </a:p>
-        </p:txBody>
-      </p:sp>
-      <p:cxnSp>
-        <p:nvCxnSpPr>
-          <p:cNvPr id="4" name="Connector 3"/>
-          <p:cNvCxnSpPr/>
-          <p:nvPr/>
-        </p:nvCxnSpPr>
-        <p:spPr>
-          <a:xfrm>
-            <a:off x="1260000" y="1080000"/>
-            <a:ext cx="684000" cy="0"/>
-          </a:xfrm>
-          <a:prstGeom prst="line">
-            <a:avLst/>
-          </a:prstGeom>
-          <a:ln w="7200">
-            <a:solidFill>
-              <a:srgbClr val="EB955C"/>
-            </a:solidFill>
-          </a:ln>
-        </p:spPr>
-      </p:cxnSp>
-      <p:sp>
-        <p:nvSpPr>
-          <p:cNvPr id="5" name="Oval 4"/>
-          <p:cNvSpPr/>
-          <p:nvPr/>
-        </p:nvSpPr>
-        <p:spPr>
-          <a:xfrm>
-            <a:off x="1594800" y="1054800"/>
-            <a:ext cx="50400" cy="50400"/>
-          </a:xfrm>
-          <a:prstGeom prst="ellipse">
-            <a:avLst/>
-          </a:prstGeom>
-          <a:solidFill>
-            <a:srgbClr val="EB955C"/>
-          </a:solidFill>
-          <a:ln>
-            <a:noFill/>
-          </a:ln>
-        </p:spPr>
-        <p:txBody>
-          <a:bodyPr rtlCol="0" anchor="ctr"/>
-          <a:lstStyle/>
-          <a:p>
-            <a:pPr algn="ctr"/>
-          </a:p>
-        </p:txBody>
-      </p:sp>
-      <p:sp>
-        <p:nvSpPr>
-          <p:cNvPr id="6" name="텍스트"/>
-          <p:cNvSpPr txBox="1"/>
-          <p:nvPr/>
-        </p:nvSpPr>
-        <p:spPr>
-          <a:xfrm>
-            <a:off x="360000" y="1224000"/>
-            <a:ext cx="2520000" cy="108000"/>
-          </a:xfrm>
-          <a:prstGeom prst="rect">
-            <a:avLst/>
-          </a:prstGeom>
-          <a:noFill/>
-        </p:spPr>
-        <p:txBody>
-          <a:bodyPr wrap="square" lIns="0" rIns="0" tIns="0" bIns="0" anchor="t">
-            <a:spAutoFit/>
-          </a:bodyPr>
-          <a:lstStyle/>
-          <a:p>
-            <a:pPr algn="ctr">
-              <a:lnSpc>
-                <a:spcPts val="1087"/>
-              </a:lnSpc>
-            </a:pPr>
-            <a:r>
-              <a:rPr sz="750" b="1" spc="300">
-                <a:solidFill>
-                  <a:srgbClr val="DBC6B8"/>
-                </a:solidFill>
-                <a:latin typeface="맑은 고딕"/>
-                <a:ea typeface="맑은 고딕"/>
-              </a:rPr>
-              <a:t>학교 · 학원 이름</a:t>
-            </a:r>
-          </a:p>
-        </p:txBody>
-      </p:sp>
-      <p:sp>
-        <p:nvSpPr>
-          <p:cNvPr id="7" name="Freeform 6"/>
-          <p:cNvSpPr/>
-          <p:nvPr/>
-        </p:nvSpPr>
-        <p:spPr>
-          <a:xfrm>
-            <a:off x="1537200" y="273600"/>
-            <a:ext cx="79200" cy="115200"/>
+            <a:off x="0" y="0"/>
+            <a:ext cx="1080000" cy="1080000"/>
           </a:xfrm>
           <a:custGeom>
             <a:avLst/>
@@ -4438,25 +3614,91 @@
             <a:cxnLst/>
             <a:rect l="l" t="t" r="r" b="b"/>
             <a:pathLst>
-              <a:path w="79200" h="115200">
+              <a:path w="1080000" h="1080000">
                 <a:moveTo>
                   <a:pt x="0" y="0"/>
                 </a:moveTo>
                 <a:lnTo>
-                  <a:pt x="79200" y="14400"/>
-                </a:lnTo>
-                <a:lnTo>
-                  <a:pt x="79200" y="115200"/>
-                </a:lnTo>
-                <a:lnTo>
-                  <a:pt x="0" y="100800"/>
+                  <a:pt x="1080000" y="0"/>
+                </a:lnTo>
+                <a:lnTo>
+                  <a:pt x="1077688" y="70635"/>
+                </a:lnTo>
+                <a:lnTo>
+                  <a:pt x="1070760" y="140968"/>
+                </a:lnTo>
+                <a:lnTo>
+                  <a:pt x="1059248" y="210698"/>
+                </a:lnTo>
+                <a:lnTo>
+                  <a:pt x="1043200" y="279525"/>
+                </a:lnTo>
+                <a:lnTo>
+                  <a:pt x="1022685" y="347155"/>
+                </a:lnTo>
+                <a:lnTo>
+                  <a:pt x="997790" y="413298"/>
+                </a:lnTo>
+                <a:lnTo>
+                  <a:pt x="968623" y="477672"/>
+                </a:lnTo>
+                <a:lnTo>
+                  <a:pt x="935307" y="540000"/>
+                </a:lnTo>
+                <a:lnTo>
+                  <a:pt x="897987" y="600016"/>
+                </a:lnTo>
+                <a:lnTo>
+                  <a:pt x="856822" y="657462"/>
+                </a:lnTo>
+                <a:lnTo>
+                  <a:pt x="811987" y="712093"/>
+                </a:lnTo>
+                <a:lnTo>
+                  <a:pt x="763675" y="763675"/>
+                </a:lnTo>
+                <a:lnTo>
+                  <a:pt x="712093" y="811987"/>
+                </a:lnTo>
+                <a:lnTo>
+                  <a:pt x="657462" y="856822"/>
+                </a:lnTo>
+                <a:lnTo>
+                  <a:pt x="600016" y="897987"/>
+                </a:lnTo>
+                <a:lnTo>
+                  <a:pt x="540000" y="935307"/>
+                </a:lnTo>
+                <a:lnTo>
+                  <a:pt x="477672" y="968623"/>
+                </a:lnTo>
+                <a:lnTo>
+                  <a:pt x="413298" y="997790"/>
+                </a:lnTo>
+                <a:lnTo>
+                  <a:pt x="347155" y="1022685"/>
+                </a:lnTo>
+                <a:lnTo>
+                  <a:pt x="279525" y="1043200"/>
+                </a:lnTo>
+                <a:lnTo>
+                  <a:pt x="210698" y="1059248"/>
+                </a:lnTo>
+                <a:lnTo>
+                  <a:pt x="140968" y="1070760"/>
+                </a:lnTo>
+                <a:lnTo>
+                  <a:pt x="70635" y="1077688"/>
+                </a:lnTo>
+                <a:lnTo>
+                  <a:pt x="0" y="1080000"/>
                 </a:lnTo>
                 <a:close/>
               </a:path>
             </a:pathLst>
           </a:custGeom>
           <a:solidFill>
-            <a:srgbClr val="EB955C"/>
+            <a:srgbClr val="818181"/>
           </a:solidFill>
           <a:ln>
             <a:noFill/>
@@ -4472,14 +3714,14 @@
       </p:sp>
       <p:sp>
         <p:nvSpPr>
-          <p:cNvPr id="8" name="Freeform 7"/>
+          <p:cNvPr id="3" name="Freeform 2"/>
           <p:cNvSpPr/>
           <p:nvPr/>
         </p:nvSpPr>
         <p:spPr>
           <a:xfrm>
-            <a:off x="1623600" y="273600"/>
-            <a:ext cx="79200" cy="115200"/>
+            <a:off x="0" y="0"/>
+            <a:ext cx="684000" cy="684000"/>
           </a:xfrm>
           <a:custGeom>
             <a:avLst/>
@@ -4488,25 +3730,91 @@
             <a:cxnLst/>
             <a:rect l="l" t="t" r="r" b="b"/>
             <a:pathLst>
-              <a:path w="79200" h="115200">
+              <a:path w="684000" h="684000">
                 <a:moveTo>
-                  <a:pt x="79200" y="0"/>
+                  <a:pt x="0" y="0"/>
                 </a:moveTo>
                 <a:lnTo>
-                  <a:pt x="0" y="14400"/>
-                </a:lnTo>
-                <a:lnTo>
-                  <a:pt x="0" y="115200"/>
-                </a:lnTo>
-                <a:lnTo>
-                  <a:pt x="79200" y="100800"/>
+                  <a:pt x="684000" y="0"/>
+                </a:lnTo>
+                <a:lnTo>
+                  <a:pt x="682536" y="44736"/>
+                </a:lnTo>
+                <a:lnTo>
+                  <a:pt x="678148" y="89280"/>
+                </a:lnTo>
+                <a:lnTo>
+                  <a:pt x="670857" y="133442"/>
+                </a:lnTo>
+                <a:lnTo>
+                  <a:pt x="660693" y="177032"/>
+                </a:lnTo>
+                <a:lnTo>
+                  <a:pt x="647700" y="219865"/>
+                </a:lnTo>
+                <a:lnTo>
+                  <a:pt x="631934" y="261755"/>
+                </a:lnTo>
+                <a:lnTo>
+                  <a:pt x="613461" y="302525"/>
+                </a:lnTo>
+                <a:lnTo>
+                  <a:pt x="592361" y="342000"/>
+                </a:lnTo>
+                <a:lnTo>
+                  <a:pt x="568725" y="380010"/>
+                </a:lnTo>
+                <a:lnTo>
+                  <a:pt x="542654" y="416393"/>
+                </a:lnTo>
+                <a:lnTo>
+                  <a:pt x="514258" y="450993"/>
+                </a:lnTo>
+                <a:lnTo>
+                  <a:pt x="483661" y="483661"/>
+                </a:lnTo>
+                <a:lnTo>
+                  <a:pt x="450993" y="514258"/>
+                </a:lnTo>
+                <a:lnTo>
+                  <a:pt x="416393" y="542654"/>
+                </a:lnTo>
+                <a:lnTo>
+                  <a:pt x="380010" y="568725"/>
+                </a:lnTo>
+                <a:lnTo>
+                  <a:pt x="342000" y="592361"/>
+                </a:lnTo>
+                <a:lnTo>
+                  <a:pt x="302525" y="613461"/>
+                </a:lnTo>
+                <a:lnTo>
+                  <a:pt x="261755" y="631934"/>
+                </a:lnTo>
+                <a:lnTo>
+                  <a:pt x="219865" y="647700"/>
+                </a:lnTo>
+                <a:lnTo>
+                  <a:pt x="177032" y="660693"/>
+                </a:lnTo>
+                <a:lnTo>
+                  <a:pt x="133442" y="670857"/>
+                </a:lnTo>
+                <a:lnTo>
+                  <a:pt x="89280" y="678148"/>
+                </a:lnTo>
+                <a:lnTo>
+                  <a:pt x="44736" y="682536"/>
+                </a:lnTo>
+                <a:lnTo>
+                  <a:pt x="0" y="684000"/>
                 </a:lnTo>
                 <a:close/>
               </a:path>
             </a:pathLst>
           </a:custGeom>
           <a:solidFill>
-            <a:srgbClr val="9B5F37"/>
+            <a:srgbClr val="26292D"/>
           </a:solidFill>
           <a:ln>
             <a:noFill/>
@@ -4517,6 +3825,103 @@
           <a:lstStyle/>
           <a:p>
             <a:pPr algn="ctr"/>
+          </a:p>
+        </p:txBody>
+      </p:sp>
+      <p:sp>
+        <p:nvSpPr>
+          <p:cNvPr id="4" name="텍스트"/>
+          <p:cNvSpPr txBox="1"/>
+          <p:nvPr/>
+        </p:nvSpPr>
+        <p:spPr>
+          <a:xfrm>
+            <a:off x="1188000" y="1044000"/>
+            <a:ext cx="1800000" cy="432000"/>
+          </a:xfrm>
+          <a:prstGeom prst="rect">
+            <a:avLst/>
+          </a:prstGeom>
+          <a:noFill/>
+        </p:spPr>
+        <p:txBody>
+          <a:bodyPr wrap="square" lIns="0" rIns="0" tIns="0" bIns="0" anchor="t">
+            <a:spAutoFit/>
+          </a:bodyPr>
+          <a:lstStyle/>
+          <a:p>
+            <a:pPr algn="r">
+              <a:lnSpc>
+                <a:spcPts val="1739"/>
+              </a:lnSpc>
+            </a:pPr>
+            <a:r>
+              <a:rPr sz="1200" b="1">
+                <a:solidFill>
+                  <a:srgbClr val="FFFFFF"/>
+                </a:solidFill>
+                <a:latin typeface="맑은 고딕"/>
+                <a:ea typeface="맑은 고딕"/>
+              </a:rPr>
+              <a:t>작은 변화도</a:t>
+            </a:r>
+          </a:p>
+          <a:p>
+            <a:pPr algn="r">
+              <a:lnSpc>
+                <a:spcPts val="1739"/>
+              </a:lnSpc>
+            </a:pPr>
+            <a:r>
+              <a:rPr sz="1200" b="1">
+                <a:solidFill>
+                  <a:srgbClr val="FFFFFF"/>
+                </a:solidFill>
+                <a:latin typeface="맑은 고딕"/>
+                <a:ea typeface="맑은 고딕"/>
+              </a:rPr>
+              <a:t>놓치지 않겠습니다</a:t>
+            </a:r>
+          </a:p>
+        </p:txBody>
+      </p:sp>
+      <p:sp>
+        <p:nvSpPr>
+          <p:cNvPr id="5" name="텍스트"/>
+          <p:cNvSpPr txBox="1"/>
+          <p:nvPr/>
+        </p:nvSpPr>
+        <p:spPr>
+          <a:xfrm>
+            <a:off x="1188000" y="1526400"/>
+            <a:ext cx="1800000" cy="123826"/>
+          </a:xfrm>
+          <a:prstGeom prst="rect">
+            <a:avLst/>
+          </a:prstGeom>
+          <a:noFill/>
+        </p:spPr>
+        <p:txBody>
+          <a:bodyPr wrap="square" lIns="0" rIns="0" tIns="0" bIns="0" anchor="t">
+            <a:spAutoFit/>
+          </a:bodyPr>
+          <a:lstStyle/>
+          <a:p>
+            <a:pPr algn="r">
+              <a:lnSpc>
+                <a:spcPts val="942"/>
+              </a:lnSpc>
+            </a:pPr>
+            <a:r>
+              <a:rPr sz="650" b="1" spc="200">
+                <a:solidFill>
+                  <a:srgbClr val="A3A9B5"/>
+                </a:solidFill>
+                <a:latin typeface="맑은 고딕"/>
+                <a:ea typeface="맑은 고딕"/>
+              </a:rPr>
+              <a:t>학교 · 학원 이름</a:t>
+            </a:r>
           </a:p>
         </p:txBody>
       </p:sp>

--- a/public/fun/cards/teacher/teacher-20.pptx
+++ b/public/fun/cards/teacher/teacher-20.pptx
@@ -3105,8 +3105,8 @@
         </p:nvSpPr>
         <p:spPr>
           <a:xfrm>
-            <a:off x="252000" y="144000"/>
-            <a:ext cx="201600" cy="21600"/>
+            <a:off x="0" y="0"/>
+            <a:ext cx="3240000" cy="36000"/>
           </a:xfrm>
           <a:prstGeom prst="rect">
             <a:avLst/>
@@ -3134,8 +3134,8 @@
         </p:nvSpPr>
         <p:spPr>
           <a:xfrm>
-            <a:off x="252000" y="273600"/>
-            <a:ext cx="2160000" cy="360000"/>
+            <a:off x="252000" y="223200"/>
+            <a:ext cx="1296000" cy="237600"/>
           </a:xfrm>
           <a:prstGeom prst="rect">
             <a:avLst/>
@@ -3150,11 +3150,11 @@
           <a:p>
             <a:pPr algn="l">
               <a:lnSpc>
-                <a:spcPts val="3190"/>
+                <a:spcPts val="1957"/>
               </a:lnSpc>
             </a:pPr>
             <a:r>
-              <a:rPr sz="2200" b="1">
+              <a:rPr sz="1350" b="1" spc="120">
                 <a:solidFill>
                   <a:srgbClr val="FFFFFF"/>
                 </a:solidFill>
@@ -3174,8 +3174,8 @@
         </p:nvSpPr>
         <p:spPr>
           <a:xfrm>
-            <a:off x="252000" y="676800"/>
-            <a:ext cx="2160000" cy="171451"/>
+            <a:off x="252000" y="475200"/>
+            <a:ext cx="1296000" cy="133351"/>
           </a:xfrm>
           <a:prstGeom prst="rect">
             <a:avLst/>
@@ -3190,11 +3190,11 @@
           <a:p>
             <a:pPr algn="l">
               <a:lnSpc>
-                <a:spcPts val="1305"/>
+                <a:spcPts val="1015"/>
               </a:lnSpc>
             </a:pPr>
             <a:r>
-              <a:rPr sz="900" b="0">
+              <a:rPr sz="700" b="0">
                 <a:solidFill>
                   <a:srgbClr val="CBCBCB"/>
                 </a:solidFill>
@@ -3214,7 +3214,7 @@
         </p:nvSpPr>
         <p:spPr>
           <a:xfrm>
-            <a:off x="1548000" y="230400"/>
+            <a:off x="1548000" y="259200"/>
             <a:ext cx="1440000" cy="123826"/>
           </a:xfrm>
           <a:prstGeom prst="rect">
@@ -3234,7 +3234,7 @@
               </a:lnSpc>
             </a:pPr>
             <a:r>
-              <a:rPr sz="650" b="1" spc="200">
+              <a:rPr sz="650" b="1" spc="220">
                 <a:solidFill>
                   <a:srgbClr val="CBCBCB"/>
                 </a:solidFill>
@@ -3254,13 +3254,13 @@
         </p:nvCxnSpPr>
         <p:spPr>
           <a:xfrm>
-            <a:off x="252000" y="1051200"/>
+            <a:off x="252000" y="907200"/>
             <a:ext cx="2736000" cy="0"/>
           </a:xfrm>
           <a:prstGeom prst="line">
             <a:avLst/>
           </a:prstGeom>
-          <a:ln w="5760">
+          <a:ln w="3600">
             <a:solidFill>
               <a:srgbClr val="707070"/>
             </a:solidFill>
@@ -3275,8 +3275,8 @@
         </p:nvSpPr>
         <p:spPr>
           <a:xfrm>
-            <a:off x="252000" y="1123200"/>
-            <a:ext cx="576000" cy="99061"/>
+            <a:off x="252000" y="986400"/>
+            <a:ext cx="576000" cy="91441"/>
           </a:xfrm>
           <a:prstGeom prst="rect">
             <a:avLst/>
@@ -3291,11 +3291,11 @@
           <a:p>
             <a:pPr algn="l">
               <a:lnSpc>
-                <a:spcPts val="754"/>
+                <a:spcPts val="696"/>
               </a:lnSpc>
             </a:pPr>
             <a:r>
-              <a:rPr sz="520" b="1" spc="150">
+              <a:rPr sz="480" b="1" spc="160">
                 <a:solidFill>
                   <a:srgbClr val="CBCBCB"/>
                 </a:solidFill>
@@ -3315,8 +3315,8 @@
         </p:nvSpPr>
         <p:spPr>
           <a:xfrm>
-            <a:off x="900000" y="1101600"/>
-            <a:ext cx="2088000" cy="142876"/>
+            <a:off x="936000" y="968400"/>
+            <a:ext cx="2052000" cy="133351"/>
           </a:xfrm>
           <a:prstGeom prst="rect">
             <a:avLst/>
@@ -3331,11 +3331,11 @@
           <a:p>
             <a:pPr algn="l">
               <a:lnSpc>
-                <a:spcPts val="1087"/>
+                <a:spcPts val="1015"/>
               </a:lnSpc>
             </a:pPr>
             <a:r>
-              <a:rPr sz="750" b="0">
+              <a:rPr sz="700" b="0">
                 <a:solidFill>
                   <a:srgbClr val="FFFFFF"/>
                 </a:solidFill>
@@ -3355,13 +3355,13 @@
         </p:nvCxnSpPr>
         <p:spPr>
           <a:xfrm>
-            <a:off x="252000" y="1274400"/>
+            <a:off x="252000" y="1137600"/>
             <a:ext cx="2736000" cy="0"/>
           </a:xfrm>
           <a:prstGeom prst="line">
             <a:avLst/>
           </a:prstGeom>
-          <a:ln w="5760">
+          <a:ln w="3600">
             <a:solidFill>
               <a:srgbClr val="707070"/>
             </a:solidFill>
@@ -3376,8 +3376,8 @@
         </p:nvSpPr>
         <p:spPr>
           <a:xfrm>
-            <a:off x="252000" y="1346400"/>
-            <a:ext cx="576000" cy="99061"/>
+            <a:off x="252000" y="1216800"/>
+            <a:ext cx="576000" cy="91441"/>
           </a:xfrm>
           <a:prstGeom prst="rect">
             <a:avLst/>
@@ -3392,11 +3392,11 @@
           <a:p>
             <a:pPr algn="l">
               <a:lnSpc>
-                <a:spcPts val="754"/>
+                <a:spcPts val="696"/>
               </a:lnSpc>
             </a:pPr>
             <a:r>
-              <a:rPr sz="520" b="1" spc="150">
+              <a:rPr sz="480" b="1" spc="160">
                 <a:solidFill>
                   <a:srgbClr val="CBCBCB"/>
                 </a:solidFill>
@@ -3416,8 +3416,8 @@
         </p:nvSpPr>
         <p:spPr>
           <a:xfrm>
-            <a:off x="900000" y="1324800"/>
-            <a:ext cx="2088000" cy="142876"/>
+            <a:off x="936000" y="1198800"/>
+            <a:ext cx="2052000" cy="133351"/>
           </a:xfrm>
           <a:prstGeom prst="rect">
             <a:avLst/>
@@ -3432,11 +3432,11 @@
           <a:p>
             <a:pPr algn="l">
               <a:lnSpc>
-                <a:spcPts val="1087"/>
+                <a:spcPts val="1015"/>
               </a:lnSpc>
             </a:pPr>
             <a:r>
-              <a:rPr sz="750" b="0">
+              <a:rPr sz="700" b="0">
                 <a:solidFill>
                   <a:srgbClr val="FFFFFF"/>
                 </a:solidFill>
@@ -3456,13 +3456,13 @@
         </p:nvCxnSpPr>
         <p:spPr>
           <a:xfrm>
-            <a:off x="252000" y="1497600"/>
+            <a:off x="252000" y="1368000"/>
             <a:ext cx="2736000" cy="0"/>
           </a:xfrm>
           <a:prstGeom prst="line">
             <a:avLst/>
           </a:prstGeom>
-          <a:ln w="5760">
+          <a:ln w="3600">
             <a:solidFill>
               <a:srgbClr val="707070"/>
             </a:solidFill>
@@ -3477,8 +3477,8 @@
         </p:nvSpPr>
         <p:spPr>
           <a:xfrm>
-            <a:off x="252000" y="1569600"/>
-            <a:ext cx="576000" cy="99061"/>
+            <a:off x="252000" y="1447200"/>
+            <a:ext cx="576000" cy="91441"/>
           </a:xfrm>
           <a:prstGeom prst="rect">
             <a:avLst/>
@@ -3493,11 +3493,11 @@
           <a:p>
             <a:pPr algn="l">
               <a:lnSpc>
-                <a:spcPts val="754"/>
+                <a:spcPts val="696"/>
               </a:lnSpc>
             </a:pPr>
             <a:r>
-              <a:rPr sz="520" b="1" spc="150">
+              <a:rPr sz="480" b="1" spc="160">
                 <a:solidFill>
                   <a:srgbClr val="CBCBCB"/>
                 </a:solidFill>
@@ -3517,8 +3517,8 @@
         </p:nvSpPr>
         <p:spPr>
           <a:xfrm>
-            <a:off x="900000" y="1548000"/>
-            <a:ext cx="2088000" cy="142876"/>
+            <a:off x="936000" y="1429200"/>
+            <a:ext cx="2052000" cy="133351"/>
           </a:xfrm>
           <a:prstGeom prst="rect">
             <a:avLst/>
@@ -3533,11 +3533,11 @@
           <a:p>
             <a:pPr algn="l">
               <a:lnSpc>
-                <a:spcPts val="1087"/>
+                <a:spcPts val="1015"/>
               </a:lnSpc>
             </a:pPr>
             <a:r>
-              <a:rPr sz="750" b="0">
+              <a:rPr sz="700" b="0">
                 <a:solidFill>
                   <a:srgbClr val="FFFFFF"/>
                 </a:solidFill>
@@ -3557,13 +3557,13 @@
         </p:nvCxnSpPr>
         <p:spPr>
           <a:xfrm>
-            <a:off x="252000" y="1720800"/>
+            <a:off x="252000" y="1598400"/>
             <a:ext cx="2736000" cy="0"/>
           </a:xfrm>
           <a:prstGeom prst="line">
             <a:avLst/>
           </a:prstGeom>
-          <a:ln w="5760">
+          <a:ln w="3600">
             <a:solidFill>
               <a:srgbClr val="707070"/>
             </a:solidFill>
@@ -3596,248 +3596,184 @@
         <p:nvPr/>
       </p:nvGrpSpPr>
       <p:grpSpPr/>
-      <p:sp>
-        <p:nvSpPr>
-          <p:cNvPr id="2" name="Freeform 1"/>
-          <p:cNvSpPr/>
+      <p:cxnSp>
+        <p:nvCxnSpPr>
+          <p:cNvPr id="2" name="Connector 1"/>
+          <p:cNvCxnSpPr/>
           <p:nvPr/>
-        </p:nvSpPr>
-        <p:spPr>
-          <a:xfrm>
-            <a:off x="0" y="0"/>
-            <a:ext cx="1080000" cy="1080000"/>
-          </a:xfrm>
-          <a:custGeom>
+        </p:nvCxnSpPr>
+        <p:spPr>
+          <a:xfrm>
+            <a:off x="79200" y="108000"/>
+            <a:ext cx="57600" cy="0"/>
+          </a:xfrm>
+          <a:prstGeom prst="line">
             <a:avLst/>
-            <a:gdLst/>
-            <a:ahLst/>
-            <a:cxnLst/>
-            <a:rect l="l" t="t" r="r" b="b"/>
-            <a:pathLst>
-              <a:path w="1080000" h="1080000">
-                <a:moveTo>
-                  <a:pt x="0" y="0"/>
-                </a:moveTo>
-                <a:lnTo>
-                  <a:pt x="1080000" y="0"/>
-                </a:lnTo>
-                <a:lnTo>
-                  <a:pt x="1077688" y="70635"/>
-                </a:lnTo>
-                <a:lnTo>
-                  <a:pt x="1070760" y="140968"/>
-                </a:lnTo>
-                <a:lnTo>
-                  <a:pt x="1059248" y="210698"/>
-                </a:lnTo>
-                <a:lnTo>
-                  <a:pt x="1043200" y="279525"/>
-                </a:lnTo>
-                <a:lnTo>
-                  <a:pt x="1022685" y="347155"/>
-                </a:lnTo>
-                <a:lnTo>
-                  <a:pt x="997790" y="413298"/>
-                </a:lnTo>
-                <a:lnTo>
-                  <a:pt x="968623" y="477672"/>
-                </a:lnTo>
-                <a:lnTo>
-                  <a:pt x="935307" y="540000"/>
-                </a:lnTo>
-                <a:lnTo>
-                  <a:pt x="897987" y="600016"/>
-                </a:lnTo>
-                <a:lnTo>
-                  <a:pt x="856822" y="657462"/>
-                </a:lnTo>
-                <a:lnTo>
-                  <a:pt x="811987" y="712093"/>
-                </a:lnTo>
-                <a:lnTo>
-                  <a:pt x="763675" y="763675"/>
-                </a:lnTo>
-                <a:lnTo>
-                  <a:pt x="712093" y="811987"/>
-                </a:lnTo>
-                <a:lnTo>
-                  <a:pt x="657462" y="856822"/>
-                </a:lnTo>
-                <a:lnTo>
-                  <a:pt x="600016" y="897987"/>
-                </a:lnTo>
-                <a:lnTo>
-                  <a:pt x="540000" y="935307"/>
-                </a:lnTo>
-                <a:lnTo>
-                  <a:pt x="477672" y="968623"/>
-                </a:lnTo>
-                <a:lnTo>
-                  <a:pt x="413298" y="997790"/>
-                </a:lnTo>
-                <a:lnTo>
-                  <a:pt x="347155" y="1022685"/>
-                </a:lnTo>
-                <a:lnTo>
-                  <a:pt x="279525" y="1043200"/>
-                </a:lnTo>
-                <a:lnTo>
-                  <a:pt x="210698" y="1059248"/>
-                </a:lnTo>
-                <a:lnTo>
-                  <a:pt x="140968" y="1070760"/>
-                </a:lnTo>
-                <a:lnTo>
-                  <a:pt x="70635" y="1077688"/>
-                </a:lnTo>
-                <a:lnTo>
-                  <a:pt x="0" y="1080000"/>
-                </a:lnTo>
-                <a:close/>
-              </a:path>
-            </a:pathLst>
-          </a:custGeom>
-          <a:solidFill>
-            <a:srgbClr val="818181"/>
-          </a:solidFill>
-          <a:ln>
-            <a:noFill/>
+          </a:prstGeom>
+          <a:ln w="3600">
+            <a:solidFill>
+              <a:srgbClr val="2A2F38"/>
+            </a:solidFill>
           </a:ln>
         </p:spPr>
-        <p:txBody>
-          <a:bodyPr rtlCol="0" anchor="ctr"/>
-          <a:lstStyle/>
-          <a:p>
-            <a:pPr algn="ctr"/>
-          </a:p>
-        </p:txBody>
-      </p:sp>
-      <p:sp>
-        <p:nvSpPr>
-          <p:cNvPr id="3" name="Freeform 2"/>
-          <p:cNvSpPr/>
+      </p:cxnSp>
+      <p:cxnSp>
+        <p:nvCxnSpPr>
+          <p:cNvPr id="3" name="Connector 2"/>
+          <p:cNvCxnSpPr/>
           <p:nvPr/>
-        </p:nvSpPr>
-        <p:spPr>
-          <a:xfrm>
-            <a:off x="0" y="0"/>
-            <a:ext cx="684000" cy="684000"/>
-          </a:xfrm>
-          <a:custGeom>
+        </p:nvCxnSpPr>
+        <p:spPr>
+          <a:xfrm>
+            <a:off x="108000" y="79200"/>
+            <a:ext cx="0" cy="57600"/>
+          </a:xfrm>
+          <a:prstGeom prst="line">
             <a:avLst/>
-            <a:gdLst/>
-            <a:ahLst/>
-            <a:cxnLst/>
-            <a:rect l="l" t="t" r="r" b="b"/>
-            <a:pathLst>
-              <a:path w="684000" h="684000">
-                <a:moveTo>
-                  <a:pt x="0" y="0"/>
-                </a:moveTo>
-                <a:lnTo>
-                  <a:pt x="684000" y="0"/>
-                </a:lnTo>
-                <a:lnTo>
-                  <a:pt x="682536" y="44736"/>
-                </a:lnTo>
-                <a:lnTo>
-                  <a:pt x="678148" y="89280"/>
-                </a:lnTo>
-                <a:lnTo>
-                  <a:pt x="670857" y="133442"/>
-                </a:lnTo>
-                <a:lnTo>
-                  <a:pt x="660693" y="177032"/>
-                </a:lnTo>
-                <a:lnTo>
-                  <a:pt x="647700" y="219865"/>
-                </a:lnTo>
-                <a:lnTo>
-                  <a:pt x="631934" y="261755"/>
-                </a:lnTo>
-                <a:lnTo>
-                  <a:pt x="613461" y="302525"/>
-                </a:lnTo>
-                <a:lnTo>
-                  <a:pt x="592361" y="342000"/>
-                </a:lnTo>
-                <a:lnTo>
-                  <a:pt x="568725" y="380010"/>
-                </a:lnTo>
-                <a:lnTo>
-                  <a:pt x="542654" y="416393"/>
-                </a:lnTo>
-                <a:lnTo>
-                  <a:pt x="514258" y="450993"/>
-                </a:lnTo>
-                <a:lnTo>
-                  <a:pt x="483661" y="483661"/>
-                </a:lnTo>
-                <a:lnTo>
-                  <a:pt x="450993" y="514258"/>
-                </a:lnTo>
-                <a:lnTo>
-                  <a:pt x="416393" y="542654"/>
-                </a:lnTo>
-                <a:lnTo>
-                  <a:pt x="380010" y="568725"/>
-                </a:lnTo>
-                <a:lnTo>
-                  <a:pt x="342000" y="592361"/>
-                </a:lnTo>
-                <a:lnTo>
-                  <a:pt x="302525" y="613461"/>
-                </a:lnTo>
-                <a:lnTo>
-                  <a:pt x="261755" y="631934"/>
-                </a:lnTo>
-                <a:lnTo>
-                  <a:pt x="219865" y="647700"/>
-                </a:lnTo>
-                <a:lnTo>
-                  <a:pt x="177032" y="660693"/>
-                </a:lnTo>
-                <a:lnTo>
-                  <a:pt x="133442" y="670857"/>
-                </a:lnTo>
-                <a:lnTo>
-                  <a:pt x="89280" y="678148"/>
-                </a:lnTo>
-                <a:lnTo>
-                  <a:pt x="44736" y="682536"/>
-                </a:lnTo>
-                <a:lnTo>
-                  <a:pt x="0" y="684000"/>
-                </a:lnTo>
-                <a:close/>
-              </a:path>
-            </a:pathLst>
-          </a:custGeom>
-          <a:solidFill>
-            <a:srgbClr val="26292D"/>
-          </a:solidFill>
-          <a:ln>
-            <a:noFill/>
+          </a:prstGeom>
+          <a:ln w="3600">
+            <a:solidFill>
+              <a:srgbClr val="2A2F38"/>
+            </a:solidFill>
           </a:ln>
         </p:spPr>
-        <p:txBody>
-          <a:bodyPr rtlCol="0" anchor="ctr"/>
-          <a:lstStyle/>
-          <a:p>
-            <a:pPr algn="ctr"/>
-          </a:p>
-        </p:txBody>
-      </p:sp>
-      <p:sp>
-        <p:nvSpPr>
-          <p:cNvPr id="4" name="텍스트"/>
+      </p:cxnSp>
+      <p:cxnSp>
+        <p:nvCxnSpPr>
+          <p:cNvPr id="4" name="Connector 3"/>
+          <p:cNvCxnSpPr/>
+          <p:nvPr/>
+        </p:nvCxnSpPr>
+        <p:spPr>
+          <a:xfrm>
+            <a:off x="3103200" y="108000"/>
+            <a:ext cx="57600" cy="0"/>
+          </a:xfrm>
+          <a:prstGeom prst="line">
+            <a:avLst/>
+          </a:prstGeom>
+          <a:ln w="3600">
+            <a:solidFill>
+              <a:srgbClr val="2A2F38"/>
+            </a:solidFill>
+          </a:ln>
+        </p:spPr>
+      </p:cxnSp>
+      <p:cxnSp>
+        <p:nvCxnSpPr>
+          <p:cNvPr id="5" name="Connector 4"/>
+          <p:cNvCxnSpPr/>
+          <p:nvPr/>
+        </p:nvCxnSpPr>
+        <p:spPr>
+          <a:xfrm>
+            <a:off x="3132000" y="79200"/>
+            <a:ext cx="0" cy="57600"/>
+          </a:xfrm>
+          <a:prstGeom prst="line">
+            <a:avLst/>
+          </a:prstGeom>
+          <a:ln w="3600">
+            <a:solidFill>
+              <a:srgbClr val="2A2F38"/>
+            </a:solidFill>
+          </a:ln>
+        </p:spPr>
+      </p:cxnSp>
+      <p:cxnSp>
+        <p:nvCxnSpPr>
+          <p:cNvPr id="6" name="Connector 5"/>
+          <p:cNvCxnSpPr/>
+          <p:nvPr/>
+        </p:nvCxnSpPr>
+        <p:spPr>
+          <a:xfrm>
+            <a:off x="79200" y="1692000"/>
+            <a:ext cx="57600" cy="0"/>
+          </a:xfrm>
+          <a:prstGeom prst="line">
+            <a:avLst/>
+          </a:prstGeom>
+          <a:ln w="3600">
+            <a:solidFill>
+              <a:srgbClr val="2A2F38"/>
+            </a:solidFill>
+          </a:ln>
+        </p:spPr>
+      </p:cxnSp>
+      <p:cxnSp>
+        <p:nvCxnSpPr>
+          <p:cNvPr id="7" name="Connector 6"/>
+          <p:cNvCxnSpPr/>
+          <p:nvPr/>
+        </p:nvCxnSpPr>
+        <p:spPr>
+          <a:xfrm>
+            <a:off x="108000" y="1663200"/>
+            <a:ext cx="0" cy="57600"/>
+          </a:xfrm>
+          <a:prstGeom prst="line">
+            <a:avLst/>
+          </a:prstGeom>
+          <a:ln w="3600">
+            <a:solidFill>
+              <a:srgbClr val="2A2F38"/>
+            </a:solidFill>
+          </a:ln>
+        </p:spPr>
+      </p:cxnSp>
+      <p:cxnSp>
+        <p:nvCxnSpPr>
+          <p:cNvPr id="8" name="Connector 7"/>
+          <p:cNvCxnSpPr/>
+          <p:nvPr/>
+        </p:nvCxnSpPr>
+        <p:spPr>
+          <a:xfrm>
+            <a:off x="3103200" y="1692000"/>
+            <a:ext cx="57600" cy="0"/>
+          </a:xfrm>
+          <a:prstGeom prst="line">
+            <a:avLst/>
+          </a:prstGeom>
+          <a:ln w="3600">
+            <a:solidFill>
+              <a:srgbClr val="2A2F38"/>
+            </a:solidFill>
+          </a:ln>
+        </p:spPr>
+      </p:cxnSp>
+      <p:cxnSp>
+        <p:nvCxnSpPr>
+          <p:cNvPr id="9" name="Connector 8"/>
+          <p:cNvCxnSpPr/>
+          <p:nvPr/>
+        </p:nvCxnSpPr>
+        <p:spPr>
+          <a:xfrm>
+            <a:off x="3132000" y="1663200"/>
+            <a:ext cx="0" cy="57600"/>
+          </a:xfrm>
+          <a:prstGeom prst="line">
+            <a:avLst/>
+          </a:prstGeom>
+          <a:ln w="3600">
+            <a:solidFill>
+              <a:srgbClr val="2A2F38"/>
+            </a:solidFill>
+          </a:ln>
+        </p:spPr>
+      </p:cxnSp>
+      <p:sp>
+        <p:nvSpPr>
+          <p:cNvPr id="10" name="텍스트"/>
           <p:cNvSpPr txBox="1"/>
           <p:nvPr/>
         </p:nvSpPr>
         <p:spPr>
           <a:xfrm>
-            <a:off x="1188000" y="1044000"/>
-            <a:ext cx="1800000" cy="432000"/>
+            <a:off x="252000" y="288000"/>
+            <a:ext cx="2520000" cy="123826"/>
           </a:xfrm>
           <a:prstGeom prst="rect">
             <a:avLst/>
@@ -3850,70 +3786,13 @@
           </a:bodyPr>
           <a:lstStyle/>
           <a:p>
-            <a:pPr algn="r">
-              <a:lnSpc>
-                <a:spcPts val="1739"/>
-              </a:lnSpc>
-            </a:pPr>
-            <a:r>
-              <a:rPr sz="1200" b="1">
-                <a:solidFill>
-                  <a:srgbClr val="FFFFFF"/>
-                </a:solidFill>
-                <a:latin typeface="맑은 고딕"/>
-                <a:ea typeface="맑은 고딕"/>
-              </a:rPr>
-              <a:t>작은 변화도</a:t>
-            </a:r>
-          </a:p>
-          <a:p>
-            <a:pPr algn="r">
-              <a:lnSpc>
-                <a:spcPts val="1739"/>
-              </a:lnSpc>
-            </a:pPr>
-            <a:r>
-              <a:rPr sz="1200" b="1">
-                <a:solidFill>
-                  <a:srgbClr val="FFFFFF"/>
-                </a:solidFill>
-                <a:latin typeface="맑은 고딕"/>
-                <a:ea typeface="맑은 고딕"/>
-              </a:rPr>
-              <a:t>놓치지 않겠습니다</a:t>
-            </a:r>
-          </a:p>
-        </p:txBody>
-      </p:sp>
-      <p:sp>
-        <p:nvSpPr>
-          <p:cNvPr id="5" name="텍스트"/>
-          <p:cNvSpPr txBox="1"/>
-          <p:nvPr/>
-        </p:nvSpPr>
-        <p:spPr>
-          <a:xfrm>
-            <a:off x="1188000" y="1526400"/>
-            <a:ext cx="1800000" cy="123826"/>
-          </a:xfrm>
-          <a:prstGeom prst="rect">
-            <a:avLst/>
-          </a:prstGeom>
-          <a:noFill/>
-        </p:spPr>
-        <p:txBody>
-          <a:bodyPr wrap="square" lIns="0" rIns="0" tIns="0" bIns="0" anchor="t">
-            <a:spAutoFit/>
-          </a:bodyPr>
-          <a:lstStyle/>
-          <a:p>
-            <a:pPr algn="r">
+            <a:pPr algn="ctr">
               <a:lnSpc>
                 <a:spcPts val="942"/>
               </a:lnSpc>
             </a:pPr>
             <a:r>
-              <a:rPr sz="650" b="1" spc="200">
+              <a:rPr sz="650" b="1" spc="220">
                 <a:solidFill>
                   <a:srgbClr val="A3A9B5"/>
                 </a:solidFill>
@@ -3921,6 +3800,237 @@
                 <a:ea typeface="맑은 고딕"/>
               </a:rPr>
               <a:t>학교 · 학원 이름</a:t>
+            </a:r>
+          </a:p>
+        </p:txBody>
+      </p:sp>
+      <p:sp>
+        <p:nvSpPr>
+          <p:cNvPr id="11" name="Rectangle 10"/>
+          <p:cNvSpPr/>
+          <p:nvPr/>
+        </p:nvSpPr>
+        <p:spPr>
+          <a:xfrm>
+            <a:off x="1530000" y="453600"/>
+            <a:ext cx="180000" cy="14400"/>
+          </a:xfrm>
+          <a:prstGeom prst="rect">
+            <a:avLst/>
+          </a:prstGeom>
+          <a:solidFill>
+            <a:srgbClr val="818181"/>
+          </a:solidFill>
+          <a:ln>
+            <a:noFill/>
+          </a:ln>
+        </p:spPr>
+        <p:txBody>
+          <a:bodyPr rtlCol="0" anchor="ctr"/>
+          <a:lstStyle/>
+          <a:p>
+            <a:pPr algn="ctr"/>
+          </a:p>
+        </p:txBody>
+      </p:sp>
+      <p:sp>
+        <p:nvSpPr>
+          <p:cNvPr id="12" name="텍스트"/>
+          <p:cNvSpPr txBox="1"/>
+          <p:nvPr/>
+        </p:nvSpPr>
+        <p:spPr>
+          <a:xfrm>
+            <a:off x="360000" y="619200"/>
+            <a:ext cx="2520000" cy="99061"/>
+          </a:xfrm>
+          <a:prstGeom prst="rect">
+            <a:avLst/>
+          </a:prstGeom>
+          <a:noFill/>
+        </p:spPr>
+        <p:txBody>
+          <a:bodyPr wrap="square" lIns="0" rIns="0" tIns="0" bIns="0" anchor="t">
+            <a:spAutoFit/>
+          </a:bodyPr>
+          <a:lstStyle/>
+          <a:p>
+            <a:pPr algn="ctr">
+              <a:lnSpc>
+                <a:spcPts val="754"/>
+              </a:lnSpc>
+            </a:pPr>
+            <a:r>
+              <a:rPr sz="520" b="1" spc="240">
+                <a:solidFill>
+                  <a:srgbClr val="A3A9B5"/>
+                </a:solidFill>
+                <a:latin typeface="맑은 고딕"/>
+                <a:ea typeface="맑은 고딕"/>
+              </a:rPr>
+              <a:t>수업 안내</a:t>
+            </a:r>
+          </a:p>
+        </p:txBody>
+      </p:sp>
+      <p:sp>
+        <p:nvSpPr>
+          <p:cNvPr id="13" name="텍스트"/>
+          <p:cNvSpPr txBox="1"/>
+          <p:nvPr/>
+        </p:nvSpPr>
+        <p:spPr>
+          <a:xfrm>
+            <a:off x="360000" y="741600"/>
+            <a:ext cx="2520000" cy="396000"/>
+          </a:xfrm>
+          <a:prstGeom prst="rect">
+            <a:avLst/>
+          </a:prstGeom>
+          <a:noFill/>
+        </p:spPr>
+        <p:txBody>
+          <a:bodyPr wrap="square" lIns="0" rIns="0" tIns="0" bIns="0" anchor="t">
+            <a:spAutoFit/>
+          </a:bodyPr>
+          <a:lstStyle/>
+          <a:p>
+            <a:pPr algn="ctr">
+              <a:lnSpc>
+                <a:spcPts val="1188"/>
+              </a:lnSpc>
+            </a:pPr>
+            <a:r>
+              <a:rPr sz="819" b="1">
+                <a:solidFill>
+                  <a:srgbClr val="FFFFFF"/>
+                </a:solidFill>
+                <a:latin typeface="맑은 고딕"/>
+                <a:ea typeface="맑은 고딕"/>
+              </a:rPr>
+              <a:t>사회  ·  코딩  ·  논술  ·  개별 지도</a:t>
+            </a:r>
+          </a:p>
+        </p:txBody>
+      </p:sp>
+      <p:cxnSp>
+        <p:nvCxnSpPr>
+          <p:cNvPr id="14" name="Connector 13"/>
+          <p:cNvCxnSpPr/>
+          <p:nvPr/>
+        </p:nvCxnSpPr>
+        <p:spPr>
+          <a:xfrm>
+            <a:off x="360000" y="1224000"/>
+            <a:ext cx="2520000" cy="0"/>
+          </a:xfrm>
+          <a:prstGeom prst="line">
+            <a:avLst/>
+          </a:prstGeom>
+          <a:ln w="3600">
+            <a:solidFill>
+              <a:srgbClr val="2A2F38"/>
+            </a:solidFill>
+          </a:ln>
+        </p:spPr>
+      </p:cxnSp>
+      <p:sp>
+        <p:nvSpPr>
+          <p:cNvPr id="15" name="텍스트"/>
+          <p:cNvSpPr txBox="1"/>
+          <p:nvPr/>
+        </p:nvSpPr>
+        <p:spPr>
+          <a:xfrm>
+            <a:off x="360000" y="1317600"/>
+            <a:ext cx="1224000" cy="118111"/>
+          </a:xfrm>
+          <a:prstGeom prst="rect">
+            <a:avLst/>
+          </a:prstGeom>
+          <a:noFill/>
+        </p:spPr>
+        <p:txBody>
+          <a:bodyPr wrap="square" lIns="0" rIns="0" tIns="0" bIns="0" anchor="t">
+            <a:spAutoFit/>
+          </a:bodyPr>
+          <a:lstStyle/>
+          <a:p>
+            <a:pPr algn="ctr">
+              <a:lnSpc>
+                <a:spcPts val="899"/>
+              </a:lnSpc>
+            </a:pPr>
+            <a:r>
+              <a:rPr sz="620" b="0">
+                <a:solidFill>
+                  <a:srgbClr val="FFFFFF"/>
+                </a:solidFill>
+                <a:latin typeface="맑은 고딕"/>
+                <a:ea typeface="맑은 고딕"/>
+              </a:rPr>
+              <a:t>평일 13:00 – 21:00</a:t>
+            </a:r>
+          </a:p>
+        </p:txBody>
+      </p:sp>
+      <p:cxnSp>
+        <p:nvCxnSpPr>
+          <p:cNvPr id="16" name="Connector 15"/>
+          <p:cNvCxnSpPr/>
+          <p:nvPr/>
+        </p:nvCxnSpPr>
+        <p:spPr>
+          <a:xfrm>
+            <a:off x="1620000" y="1296000"/>
+            <a:ext cx="0" cy="180000"/>
+          </a:xfrm>
+          <a:prstGeom prst="line">
+            <a:avLst/>
+          </a:prstGeom>
+          <a:ln w="3600">
+            <a:solidFill>
+              <a:srgbClr val="2A2F38"/>
+            </a:solidFill>
+          </a:ln>
+        </p:spPr>
+      </p:cxnSp>
+      <p:sp>
+        <p:nvSpPr>
+          <p:cNvPr id="17" name="텍스트"/>
+          <p:cNvSpPr txBox="1"/>
+          <p:nvPr/>
+        </p:nvSpPr>
+        <p:spPr>
+          <a:xfrm>
+            <a:off x="1656000" y="1317600"/>
+            <a:ext cx="1224000" cy="118111"/>
+          </a:xfrm>
+          <a:prstGeom prst="rect">
+            <a:avLst/>
+          </a:prstGeom>
+          <a:noFill/>
+        </p:spPr>
+        <p:txBody>
+          <a:bodyPr wrap="square" lIns="0" rIns="0" tIns="0" bIns="0" anchor="t">
+            <a:spAutoFit/>
+          </a:bodyPr>
+          <a:lstStyle/>
+          <a:p>
+            <a:pPr algn="ctr">
+              <a:lnSpc>
+                <a:spcPts val="899"/>
+              </a:lnSpc>
+            </a:pPr>
+            <a:r>
+              <a:rPr sz="620" b="0">
+                <a:solidFill>
+                  <a:srgbClr val="FFFFFF"/>
+                </a:solidFill>
+                <a:latin typeface="맑은 고딕"/>
+                <a:ea typeface="맑은 고딕"/>
+              </a:rPr>
+              <a:t>@아이디</a:t>
             </a:r>
           </a:p>
         </p:txBody>
